--- a/images/folder_structure.pptx
+++ b/images/folder_structure.pptx
@@ -5553,7 +5553,7 @@
                 <a:latin typeface="Helvetica" panose="020B0604020202020204" pitchFamily="34" charset="0"/>
                 <a:cs typeface="Helvetica" panose="020B0604020202020204" pitchFamily="34" charset="0"/>
               </a:rPr>
-              <a:t>4_docs</a:t>
+              <a:t>4_drafts</a:t>
             </a:r>
             <a:endParaRPr lang="LID4096" sz="2000" b="1" dirty="0">
               <a:latin typeface="Helvetica" panose="020B0604020202020204" pitchFamily="34" charset="0"/>
